--- a/controleGastosGabrielNicolas.pptx
+++ b/controleGastosGabrielNicolas.pptx
@@ -5771,7 +5771,40 @@
                 <a:ea typeface="Calibri" pitchFamily="34" charset="-122"/>
                 <a:cs typeface="Calibri" pitchFamily="34" charset="-120"/>
               </a:rPr>
-              <a:t>Gastos acima da média geral (R$ 318,05)</a:t>
+              <a:t>Gastos acima da </a:t>
+            </a:r>
+            <a:r>
+              <a:rPr lang="en-US" sz="1500" b="1" dirty="0" err="1">
+                <a:solidFill>
+                  <a:srgbClr val="2D1F29"/>
+                </a:solidFill>
+                <a:latin typeface="Calibri" pitchFamily="34" charset="0"/>
+                <a:ea typeface="Calibri" pitchFamily="34" charset="-122"/>
+                <a:cs typeface="Calibri" pitchFamily="34" charset="-120"/>
+              </a:rPr>
+              <a:t>média</a:t>
+            </a:r>
+            <a:r>
+              <a:rPr lang="en-US" sz="1500" b="1" dirty="0">
+                <a:solidFill>
+                  <a:srgbClr val="2D1F29"/>
+                </a:solidFill>
+                <a:latin typeface="Calibri" pitchFamily="34" charset="0"/>
+                <a:ea typeface="Calibri" pitchFamily="34" charset="-122"/>
+                <a:cs typeface="Calibri" pitchFamily="34" charset="-120"/>
+              </a:rPr>
+              <a:t> </a:t>
+            </a:r>
+            <a:r>
+              <a:rPr lang="en-US" sz="1500" b="1" dirty="0" err="1" smtClean="0">
+                <a:solidFill>
+                  <a:srgbClr val="2D1F29"/>
+                </a:solidFill>
+                <a:latin typeface="Calibri" pitchFamily="34" charset="0"/>
+                <a:ea typeface="Calibri" pitchFamily="34" charset="-122"/>
+                <a:cs typeface="Calibri" pitchFamily="34" charset="-120"/>
+              </a:rPr>
+              <a:t>geral</a:t>
             </a:r>
             <a:endParaRPr lang="en-US" sz="1500" dirty="0"/>
           </a:p>
@@ -5844,7 +5877,62 @@
                 <a:ea typeface="Calibri" pitchFamily="34" charset="-122"/>
                 <a:cs typeface="Calibri" pitchFamily="34" charset="-120"/>
               </a:rPr>
-              <a:t>4 lançamentos acima da média  →  Aluguel (R$ 1.500) · Supermercado (R$ 700) · Supermercado (R$ 650) · Manutenção do carro (R$ 400)</a:t>
+              <a:t>3</a:t>
+            </a:r>
+            <a:r>
+              <a:rPr lang="en-US" sz="1150" dirty="0" smtClean="0">
+                <a:solidFill>
+                  <a:srgbClr val="2D1F29"/>
+                </a:solidFill>
+                <a:latin typeface="Calibri" pitchFamily="34" charset="0"/>
+                <a:ea typeface="Calibri" pitchFamily="34" charset="-122"/>
+                <a:cs typeface="Calibri" pitchFamily="34" charset="-120"/>
+              </a:rPr>
+              <a:t> </a:t>
+            </a:r>
+            <a:r>
+              <a:rPr lang="en-US" sz="1150" dirty="0">
+                <a:solidFill>
+                  <a:srgbClr val="2D1F29"/>
+                </a:solidFill>
+                <a:latin typeface="Calibri" pitchFamily="34" charset="0"/>
+                <a:ea typeface="Calibri" pitchFamily="34" charset="-122"/>
+                <a:cs typeface="Calibri" pitchFamily="34" charset="-120"/>
+              </a:rPr>
+              <a:t>lançamentos acima da média  →  </a:t>
+            </a:r>
+            <a:r>
+              <a:rPr lang="en-US" sz="1150" dirty="0" err="1" smtClean="0">
+                <a:solidFill>
+                  <a:srgbClr val="2D1F29"/>
+                </a:solidFill>
+                <a:latin typeface="Calibri" pitchFamily="34" charset="0"/>
+                <a:ea typeface="Calibri" pitchFamily="34" charset="-122"/>
+                <a:cs typeface="Calibri" pitchFamily="34" charset="-120"/>
+              </a:rPr>
+              <a:t>Supermercado</a:t>
+            </a:r>
+            <a:r>
+              <a:rPr lang="en-US" sz="1150" dirty="0" smtClean="0">
+                <a:solidFill>
+                  <a:srgbClr val="2D1F29"/>
+                </a:solidFill>
+                <a:latin typeface="Calibri" pitchFamily="34" charset="0"/>
+                <a:ea typeface="Calibri" pitchFamily="34" charset="-122"/>
+                <a:cs typeface="Calibri" pitchFamily="34" charset="-120"/>
+              </a:rPr>
+              <a:t> </a:t>
+            </a:r>
+            <a:r>
+              <a:rPr lang="en-US" sz="1150" dirty="0">
+                <a:solidFill>
+                  <a:srgbClr val="2D1F29"/>
+                </a:solidFill>
+                <a:latin typeface="Calibri" pitchFamily="34" charset="0"/>
+                <a:ea typeface="Calibri" pitchFamily="34" charset="-122"/>
+                <a:cs typeface="Calibri" pitchFamily="34" charset="-120"/>
+              </a:rPr>
+              <a:t>(R$ 700) · Supermercado (R$ 650) · Manutenção do carro (R$ 400)</a:t>
             </a:r>
             <a:endParaRPr lang="en-US" sz="1150" dirty="0"/>
           </a:p>
@@ -6487,7 +6575,73 @@
                 <a:ea typeface="Calibri" pitchFamily="34" charset="-122"/>
                 <a:cs typeface="Calibri" pitchFamily="34" charset="-120"/>
               </a:rPr>
-              <a:t>4 lançamentos (27%) acima da média geral</a:t>
+              <a:t>3</a:t>
+            </a:r>
+            <a:r>
+              <a:rPr lang="en-US" sz="1300" dirty="0" smtClean="0">
+                <a:solidFill>
+                  <a:srgbClr val="FFFFFF"/>
+                </a:solidFill>
+                <a:latin typeface="Calibri" pitchFamily="34" charset="0"/>
+                <a:ea typeface="Calibri" pitchFamily="34" charset="-122"/>
+                <a:cs typeface="Calibri" pitchFamily="34" charset="-120"/>
+              </a:rPr>
+              <a:t> </a:t>
+            </a:r>
+            <a:r>
+              <a:rPr lang="en-US" sz="1300" dirty="0" err="1">
+                <a:solidFill>
+                  <a:srgbClr val="FFFFFF"/>
+                </a:solidFill>
+                <a:latin typeface="Calibri" pitchFamily="34" charset="0"/>
+                <a:ea typeface="Calibri" pitchFamily="34" charset="-122"/>
+                <a:cs typeface="Calibri" pitchFamily="34" charset="-120"/>
+              </a:rPr>
+              <a:t>lançamentos</a:t>
+            </a:r>
+            <a:r>
+              <a:rPr lang="en-US" sz="1300" dirty="0">
+                <a:solidFill>
+                  <a:srgbClr val="FFFFFF"/>
+                </a:solidFill>
+                <a:latin typeface="Calibri" pitchFamily="34" charset="0"/>
+                <a:ea typeface="Calibri" pitchFamily="34" charset="-122"/>
+                <a:cs typeface="Calibri" pitchFamily="34" charset="-120"/>
+              </a:rPr>
+              <a:t> </a:t>
+            </a:r>
+            <a:r>
+              <a:rPr lang="en-US" sz="1300" dirty="0" err="1" smtClean="0">
+                <a:solidFill>
+                  <a:srgbClr val="FFFFFF"/>
+                </a:solidFill>
+                <a:latin typeface="Calibri" pitchFamily="34" charset="0"/>
+                <a:ea typeface="Calibri" pitchFamily="34" charset="-122"/>
+                <a:cs typeface="Calibri" pitchFamily="34" charset="-120"/>
+              </a:rPr>
+              <a:t>acima</a:t>
+            </a:r>
+            <a:r>
+              <a:rPr lang="en-US" sz="1300" dirty="0" smtClean="0">
+                <a:solidFill>
+                  <a:srgbClr val="FFFFFF"/>
+                </a:solidFill>
+                <a:latin typeface="Calibri" pitchFamily="34" charset="0"/>
+                <a:ea typeface="Calibri" pitchFamily="34" charset="-122"/>
+                <a:cs typeface="Calibri" pitchFamily="34" charset="-120"/>
+              </a:rPr>
+              <a:t> </a:t>
+            </a:r>
+            <a:r>
+              <a:rPr lang="en-US" sz="1300" dirty="0">
+                <a:solidFill>
+                  <a:srgbClr val="FFFFFF"/>
+                </a:solidFill>
+                <a:latin typeface="Calibri" pitchFamily="34" charset="0"/>
+                <a:ea typeface="Calibri" pitchFamily="34" charset="-122"/>
+                <a:cs typeface="Calibri" pitchFamily="34" charset="-120"/>
+              </a:rPr>
+              <a:t>da média geral</a:t>
             </a:r>
             <a:endParaRPr lang="en-US" sz="1300" dirty="0"/>
           </a:p>

--- a/controleGastosGabrielNicolas.pptx
+++ b/controleGastosGabrielNicolas.pptx
@@ -5774,7 +5774,7 @@
               <a:t>Gastos acima da </a:t>
             </a:r>
             <a:r>
-              <a:rPr lang="en-US" sz="1500" b="1" dirty="0" err="1">
+              <a:rPr lang="en-US" sz="1500" b="1" dirty="0" err="1" smtClean="0">
                 <a:solidFill>
                   <a:srgbClr val="2D1F29"/>
                 </a:solidFill>
@@ -5783,28 +5783,6 @@
                 <a:cs typeface="Calibri" pitchFamily="34" charset="-120"/>
               </a:rPr>
               <a:t>média</a:t>
-            </a:r>
-            <a:r>
-              <a:rPr lang="en-US" sz="1500" b="1" dirty="0">
-                <a:solidFill>
-                  <a:srgbClr val="2D1F29"/>
-                </a:solidFill>
-                <a:latin typeface="Calibri" pitchFamily="34" charset="0"/>
-                <a:ea typeface="Calibri" pitchFamily="34" charset="-122"/>
-                <a:cs typeface="Calibri" pitchFamily="34" charset="-120"/>
-              </a:rPr>
-              <a:t> </a:t>
-            </a:r>
-            <a:r>
-              <a:rPr lang="en-US" sz="1500" b="1" dirty="0" err="1" smtClean="0">
-                <a:solidFill>
-                  <a:srgbClr val="2D1F29"/>
-                </a:solidFill>
-                <a:latin typeface="Calibri" pitchFamily="34" charset="0"/>
-                <a:ea typeface="Calibri" pitchFamily="34" charset="-122"/>
-                <a:cs typeface="Calibri" pitchFamily="34" charset="-120"/>
-              </a:rPr>
-              <a:t>geral</a:t>
             </a:r>
             <a:endParaRPr lang="en-US" sz="1500" dirty="0"/>
           </a:p>
@@ -6641,7 +6619,18 @@
                 <a:ea typeface="Calibri" pitchFamily="34" charset="-122"/>
                 <a:cs typeface="Calibri" pitchFamily="34" charset="-120"/>
               </a:rPr>
-              <a:t>da média geral</a:t>
+              <a:t>da </a:t>
+            </a:r>
+            <a:r>
+              <a:rPr lang="en-US" sz="1300" dirty="0" err="1" smtClean="0">
+                <a:solidFill>
+                  <a:srgbClr val="FFFFFF"/>
+                </a:solidFill>
+                <a:latin typeface="Calibri" pitchFamily="34" charset="0"/>
+                <a:ea typeface="Calibri" pitchFamily="34" charset="-122"/>
+                <a:cs typeface="Calibri" pitchFamily="34" charset="-120"/>
+              </a:rPr>
+              <a:t>média</a:t>
             </a:r>
             <a:endParaRPr lang="en-US" sz="1300" dirty="0"/>
           </a:p>
